--- a/artifacts/Capstone_Project_Brief.pptx
+++ b/artifacts/Capstone_Project_Brief.pptx
@@ -1514,7 +1514,85 @@
       </p:sp>
       <p:sp>
         <p:nvSpPr>
-          <p:cNvPr id="5" name="Shape 3"/>
+          <p:cNvPr id="5" name="Text 3"/>
+          <p:cNvSpPr/>
+          <p:nvPr/>
+        </p:nvSpPr>
+        <p:spPr>
+          <a:xfrm>
+            <a:off x="411480" y="18288"/>
+            <a:ext cx="5852160" cy="164592"/>
+          </a:xfrm>
+          <a:prstGeom prst="rect">
+            <a:avLst/>
+          </a:prstGeom>
+          <a:noFill/>
+          <a:ln/>
+        </p:spPr>
+        <p:txBody>
+          <a:bodyPr wrap="square" lIns="0" tIns="0" rIns="0" bIns="0" rtlCol="0" anchor="ctr"/>
+          <a:lstStyle/>
+          <a:p>
+            <a:pPr indent="0" marL="0">
+              <a:buNone/>
+            </a:pPr>
+            <a:r>
+              <a:rPr lang="en-US" sz="800" b="1" dirty="0">
+                <a:solidFill>
+                  <a:srgbClr val="FECACA"/>
+                </a:solidFill>
+                <a:latin typeface="Calibri" pitchFamily="34" charset="0"/>
+                <a:ea typeface="Calibri" pitchFamily="34" charset="-122"/>
+                <a:cs typeface="Calibri" pitchFamily="34" charset="-120"/>
+              </a:rPr>
+              <a:t>LOCKHEED MARTIN PROPRIETARY INFORMATION</a:t>
+            </a:r>
+            <a:endParaRPr lang="en-US" sz="800" dirty="0"/>
+          </a:p>
+        </p:txBody>
+      </p:sp>
+      <p:sp>
+        <p:nvSpPr>
+          <p:cNvPr id="6" name="Text 4"/>
+          <p:cNvSpPr/>
+          <p:nvPr/>
+        </p:nvSpPr>
+        <p:spPr>
+          <a:xfrm>
+            <a:off x="411480" y="4919472"/>
+            <a:ext cx="7498080" cy="182880"/>
+          </a:xfrm>
+          <a:prstGeom prst="rect">
+            <a:avLst/>
+          </a:prstGeom>
+          <a:noFill/>
+          <a:ln/>
+        </p:spPr>
+        <p:txBody>
+          <a:bodyPr wrap="square" lIns="0" tIns="0" rIns="0" bIns="0" rtlCol="0" anchor="ctr"/>
+          <a:lstStyle/>
+          <a:p>
+            <a:pPr indent="0" marL="0">
+              <a:buNone/>
+            </a:pPr>
+            <a:r>
+              <a:rPr lang="en-US" sz="900" dirty="0">
+                <a:solidFill>
+                  <a:srgbClr val="94A3B8"/>
+                </a:solidFill>
+                <a:latin typeface="Calibri" pitchFamily="34" charset="0"/>
+                <a:ea typeface="Calibri" pitchFamily="34" charset="-122"/>
+                <a:cs typeface="Calibri" pitchFamily="34" charset="-120"/>
+              </a:rPr>
+              <a:t>Thomas Rathbun, PhD  ·  LOCKHEED MARTIN PROPRIETARY INFORMATION</a:t>
+            </a:r>
+            <a:endParaRPr lang="en-US" sz="900" dirty="0"/>
+          </a:p>
+        </p:txBody>
+      </p:sp>
+      <p:sp>
+        <p:nvSpPr>
+          <p:cNvPr id="7" name="Shape 5"/>
           <p:cNvSpPr/>
           <p:nvPr/>
         </p:nvSpPr>
@@ -1541,7 +1619,7 @@
       </p:sp>
       <p:sp>
         <p:nvSpPr>
-          <p:cNvPr id="6" name="Text 4"/>
+          <p:cNvPr id="8" name="Text 6"/>
           <p:cNvSpPr/>
           <p:nvPr/>
         </p:nvSpPr>
@@ -1580,7 +1658,7 @@
       </p:sp>
       <p:sp>
         <p:nvSpPr>
-          <p:cNvPr id="7" name="Shape 5"/>
+          <p:cNvPr id="9" name="Shape 7"/>
           <p:cNvSpPr/>
           <p:nvPr/>
         </p:nvSpPr>
@@ -1607,7 +1685,7 @@
       </p:sp>
       <p:sp>
         <p:nvSpPr>
-          <p:cNvPr id="8" name="Shape 6"/>
+          <p:cNvPr id="10" name="Shape 8"/>
           <p:cNvSpPr/>
           <p:nvPr/>
         </p:nvSpPr>
@@ -1632,7 +1710,7 @@
       </p:sp>
       <p:sp>
         <p:nvSpPr>
-          <p:cNvPr id="9" name="Text 7"/>
+          <p:cNvPr id="11" name="Text 9"/>
           <p:cNvSpPr/>
           <p:nvPr/>
         </p:nvSpPr>
@@ -1671,7 +1749,7 @@
       </p:sp>
       <p:sp>
         <p:nvSpPr>
-          <p:cNvPr id="10" name="Text 8"/>
+          <p:cNvPr id="12" name="Text 10"/>
           <p:cNvSpPr/>
           <p:nvPr/>
         </p:nvSpPr>
@@ -1710,7 +1788,7 @@
       </p:sp>
       <p:sp>
         <p:nvSpPr>
-          <p:cNvPr id="11" name="Text 9"/>
+          <p:cNvPr id="13" name="Text 11"/>
           <p:cNvSpPr/>
           <p:nvPr/>
         </p:nvSpPr>
@@ -1749,7 +1827,7 @@
       </p:sp>
       <p:sp>
         <p:nvSpPr>
-          <p:cNvPr id="12" name="Shape 10"/>
+          <p:cNvPr id="14" name="Shape 12"/>
           <p:cNvSpPr/>
           <p:nvPr/>
         </p:nvSpPr>
@@ -1776,7 +1854,7 @@
       </p:sp>
       <p:sp>
         <p:nvSpPr>
-          <p:cNvPr id="13" name="Shape 11"/>
+          <p:cNvPr id="15" name="Shape 13"/>
           <p:cNvSpPr/>
           <p:nvPr/>
         </p:nvSpPr>
@@ -1801,7 +1879,7 @@
       </p:sp>
       <p:sp>
         <p:nvSpPr>
-          <p:cNvPr id="14" name="Text 12"/>
+          <p:cNvPr id="16" name="Text 14"/>
           <p:cNvSpPr/>
           <p:nvPr/>
         </p:nvSpPr>
@@ -1840,7 +1918,7 @@
       </p:sp>
       <p:sp>
         <p:nvSpPr>
-          <p:cNvPr id="15" name="Text 13"/>
+          <p:cNvPr id="17" name="Text 15"/>
           <p:cNvSpPr/>
           <p:nvPr/>
         </p:nvSpPr>
@@ -1879,7 +1957,7 @@
       </p:sp>
       <p:sp>
         <p:nvSpPr>
-          <p:cNvPr id="16" name="Text 14"/>
+          <p:cNvPr id="18" name="Text 16"/>
           <p:cNvSpPr/>
           <p:nvPr/>
         </p:nvSpPr>
@@ -1918,7 +1996,7 @@
       </p:sp>
       <p:sp>
         <p:nvSpPr>
-          <p:cNvPr id="17" name="Shape 15"/>
+          <p:cNvPr id="19" name="Shape 17"/>
           <p:cNvSpPr/>
           <p:nvPr/>
         </p:nvSpPr>
@@ -1945,7 +2023,7 @@
       </p:sp>
       <p:sp>
         <p:nvSpPr>
-          <p:cNvPr id="18" name="Shape 16"/>
+          <p:cNvPr id="20" name="Shape 18"/>
           <p:cNvSpPr/>
           <p:nvPr/>
         </p:nvSpPr>
@@ -1970,7 +2048,7 @@
       </p:sp>
       <p:sp>
         <p:nvSpPr>
-          <p:cNvPr id="19" name="Text 17"/>
+          <p:cNvPr id="21" name="Text 19"/>
           <p:cNvSpPr/>
           <p:nvPr/>
         </p:nvSpPr>
@@ -2009,7 +2087,7 @@
       </p:sp>
       <p:sp>
         <p:nvSpPr>
-          <p:cNvPr id="20" name="Text 18"/>
+          <p:cNvPr id="22" name="Text 20"/>
           <p:cNvSpPr/>
           <p:nvPr/>
         </p:nvSpPr>
@@ -2048,7 +2126,7 @@
       </p:sp>
       <p:sp>
         <p:nvSpPr>
-          <p:cNvPr id="21" name="Text 19"/>
+          <p:cNvPr id="23" name="Text 21"/>
           <p:cNvSpPr/>
           <p:nvPr/>
         </p:nvSpPr>
@@ -2087,7 +2165,7 @@
       </p:sp>
       <p:sp>
         <p:nvSpPr>
-          <p:cNvPr id="22" name="Text 20"/>
+          <p:cNvPr id="24" name="Text 22"/>
           <p:cNvSpPr/>
           <p:nvPr/>
         </p:nvSpPr>
@@ -2126,7 +2204,7 @@
       </p:sp>
       <p:sp>
         <p:nvSpPr>
-          <p:cNvPr id="23" name="Text 21"/>
+          <p:cNvPr id="25" name="Text 23"/>
           <p:cNvSpPr/>
           <p:nvPr/>
         </p:nvSpPr>
@@ -2300,7 +2378,85 @@
       </p:sp>
       <p:sp>
         <p:nvSpPr>
-          <p:cNvPr id="5" name="Shape 3"/>
+          <p:cNvPr id="5" name="Text 3"/>
+          <p:cNvSpPr/>
+          <p:nvPr/>
+        </p:nvSpPr>
+        <p:spPr>
+          <a:xfrm>
+            <a:off x="411480" y="18288"/>
+            <a:ext cx="5852160" cy="164592"/>
+          </a:xfrm>
+          <a:prstGeom prst="rect">
+            <a:avLst/>
+          </a:prstGeom>
+          <a:noFill/>
+          <a:ln/>
+        </p:spPr>
+        <p:txBody>
+          <a:bodyPr wrap="square" lIns="0" tIns="0" rIns="0" bIns="0" rtlCol="0" anchor="ctr"/>
+          <a:lstStyle/>
+          <a:p>
+            <a:pPr indent="0" marL="0">
+              <a:buNone/>
+            </a:pPr>
+            <a:r>
+              <a:rPr lang="en-US" sz="800" b="1" dirty="0">
+                <a:solidFill>
+                  <a:srgbClr val="FECACA"/>
+                </a:solidFill>
+                <a:latin typeface="Calibri" pitchFamily="34" charset="0"/>
+                <a:ea typeface="Calibri" pitchFamily="34" charset="-122"/>
+                <a:cs typeface="Calibri" pitchFamily="34" charset="-120"/>
+              </a:rPr>
+              <a:t>LOCKHEED MARTIN PROPRIETARY INFORMATION</a:t>
+            </a:r>
+            <a:endParaRPr lang="en-US" sz="800" dirty="0"/>
+          </a:p>
+        </p:txBody>
+      </p:sp>
+      <p:sp>
+        <p:nvSpPr>
+          <p:cNvPr id="6" name="Text 4"/>
+          <p:cNvSpPr/>
+          <p:nvPr/>
+        </p:nvSpPr>
+        <p:spPr>
+          <a:xfrm>
+            <a:off x="411480" y="4919472"/>
+            <a:ext cx="7498080" cy="182880"/>
+          </a:xfrm>
+          <a:prstGeom prst="rect">
+            <a:avLst/>
+          </a:prstGeom>
+          <a:noFill/>
+          <a:ln/>
+        </p:spPr>
+        <p:txBody>
+          <a:bodyPr wrap="square" lIns="0" tIns="0" rIns="0" bIns="0" rtlCol="0" anchor="ctr"/>
+          <a:lstStyle/>
+          <a:p>
+            <a:pPr indent="0" marL="0">
+              <a:buNone/>
+            </a:pPr>
+            <a:r>
+              <a:rPr lang="en-US" sz="900" dirty="0">
+                <a:solidFill>
+                  <a:srgbClr val="94A3B8"/>
+                </a:solidFill>
+                <a:latin typeface="Calibri" pitchFamily="34" charset="0"/>
+                <a:ea typeface="Calibri" pitchFamily="34" charset="-122"/>
+                <a:cs typeface="Calibri" pitchFamily="34" charset="-120"/>
+              </a:rPr>
+              <a:t>Thomas Rathbun, PhD  ·  LOCKHEED MARTIN PROPRIETARY INFORMATION</a:t>
+            </a:r>
+            <a:endParaRPr lang="en-US" sz="900" dirty="0"/>
+          </a:p>
+        </p:txBody>
+      </p:sp>
+      <p:sp>
+        <p:nvSpPr>
+          <p:cNvPr id="7" name="Shape 5"/>
           <p:cNvSpPr/>
           <p:nvPr/>
         </p:nvSpPr>
@@ -2327,7 +2483,7 @@
       </p:sp>
       <p:sp>
         <p:nvSpPr>
-          <p:cNvPr id="6" name="Text 4"/>
+          <p:cNvPr id="8" name="Text 6"/>
           <p:cNvSpPr/>
           <p:nvPr/>
         </p:nvSpPr>
@@ -2366,7 +2522,7 @@
       </p:sp>
       <p:sp>
         <p:nvSpPr>
-          <p:cNvPr id="7" name="Shape 5"/>
+          <p:cNvPr id="9" name="Shape 7"/>
           <p:cNvSpPr/>
           <p:nvPr/>
         </p:nvSpPr>
@@ -2393,7 +2549,7 @@
       </p:sp>
       <p:sp>
         <p:nvSpPr>
-          <p:cNvPr id="8" name="Shape 6"/>
+          <p:cNvPr id="10" name="Shape 8"/>
           <p:cNvSpPr/>
           <p:nvPr/>
         </p:nvSpPr>
@@ -2418,7 +2574,7 @@
       </p:sp>
       <p:sp>
         <p:nvSpPr>
-          <p:cNvPr id="9" name="Shape 7"/>
+          <p:cNvPr id="11" name="Shape 9"/>
           <p:cNvSpPr/>
           <p:nvPr/>
         </p:nvSpPr>
@@ -2443,7 +2599,7 @@
       </p:sp>
       <p:sp>
         <p:nvSpPr>
-          <p:cNvPr id="10" name="Text 8"/>
+          <p:cNvPr id="12" name="Text 10"/>
           <p:cNvSpPr/>
           <p:nvPr/>
         </p:nvSpPr>
@@ -2482,7 +2638,7 @@
       </p:sp>
       <p:sp>
         <p:nvSpPr>
-          <p:cNvPr id="11" name="Text 9"/>
+          <p:cNvPr id="13" name="Text 11"/>
           <p:cNvSpPr/>
           <p:nvPr/>
         </p:nvSpPr>
@@ -2521,7 +2677,7 @@
       </p:sp>
       <p:sp>
         <p:nvSpPr>
-          <p:cNvPr id="12" name="Text 10"/>
+          <p:cNvPr id="14" name="Text 12"/>
           <p:cNvSpPr/>
           <p:nvPr/>
         </p:nvSpPr>
@@ -2560,7 +2716,7 @@
       </p:sp>
       <p:sp>
         <p:nvSpPr>
-          <p:cNvPr id="13" name="Shape 11"/>
+          <p:cNvPr id="15" name="Shape 13"/>
           <p:cNvSpPr/>
           <p:nvPr/>
         </p:nvSpPr>
@@ -2587,7 +2743,7 @@
       </p:sp>
       <p:sp>
         <p:nvSpPr>
-          <p:cNvPr id="14" name="Shape 12"/>
+          <p:cNvPr id="16" name="Shape 14"/>
           <p:cNvSpPr/>
           <p:nvPr/>
         </p:nvSpPr>
@@ -2612,7 +2768,7 @@
       </p:sp>
       <p:sp>
         <p:nvSpPr>
-          <p:cNvPr id="15" name="Shape 13"/>
+          <p:cNvPr id="17" name="Shape 15"/>
           <p:cNvSpPr/>
           <p:nvPr/>
         </p:nvSpPr>
@@ -2637,7 +2793,7 @@
       </p:sp>
       <p:sp>
         <p:nvSpPr>
-          <p:cNvPr id="16" name="Text 14"/>
+          <p:cNvPr id="18" name="Text 16"/>
           <p:cNvSpPr/>
           <p:nvPr/>
         </p:nvSpPr>
@@ -2676,7 +2832,7 @@
       </p:sp>
       <p:sp>
         <p:nvSpPr>
-          <p:cNvPr id="17" name="Text 15"/>
+          <p:cNvPr id="19" name="Text 17"/>
           <p:cNvSpPr/>
           <p:nvPr/>
         </p:nvSpPr>
@@ -2715,7 +2871,7 @@
       </p:sp>
       <p:sp>
         <p:nvSpPr>
-          <p:cNvPr id="18" name="Text 16"/>
+          <p:cNvPr id="20" name="Text 18"/>
           <p:cNvSpPr/>
           <p:nvPr/>
         </p:nvSpPr>
@@ -2754,7 +2910,7 @@
       </p:sp>
       <p:sp>
         <p:nvSpPr>
-          <p:cNvPr id="19" name="Shape 17"/>
+          <p:cNvPr id="21" name="Shape 19"/>
           <p:cNvSpPr/>
           <p:nvPr/>
         </p:nvSpPr>
@@ -2781,7 +2937,7 @@
       </p:sp>
       <p:sp>
         <p:nvSpPr>
-          <p:cNvPr id="20" name="Shape 18"/>
+          <p:cNvPr id="22" name="Shape 20"/>
           <p:cNvSpPr/>
           <p:nvPr/>
         </p:nvSpPr>
@@ -2806,7 +2962,7 @@
       </p:sp>
       <p:sp>
         <p:nvSpPr>
-          <p:cNvPr id="21" name="Shape 19"/>
+          <p:cNvPr id="23" name="Shape 21"/>
           <p:cNvSpPr/>
           <p:nvPr/>
         </p:nvSpPr>
@@ -2831,7 +2987,7 @@
       </p:sp>
       <p:sp>
         <p:nvSpPr>
-          <p:cNvPr id="22" name="Text 20"/>
+          <p:cNvPr id="24" name="Text 22"/>
           <p:cNvSpPr/>
           <p:nvPr/>
         </p:nvSpPr>
@@ -2870,7 +3026,7 @@
       </p:sp>
       <p:sp>
         <p:nvSpPr>
-          <p:cNvPr id="23" name="Text 21"/>
+          <p:cNvPr id="25" name="Text 23"/>
           <p:cNvSpPr/>
           <p:nvPr/>
         </p:nvSpPr>
@@ -2909,7 +3065,7 @@
       </p:sp>
       <p:sp>
         <p:nvSpPr>
-          <p:cNvPr id="24" name="Text 22"/>
+          <p:cNvPr id="26" name="Text 24"/>
           <p:cNvSpPr/>
           <p:nvPr/>
         </p:nvSpPr>
@@ -2948,7 +3104,7 @@
       </p:sp>
       <p:sp>
         <p:nvSpPr>
-          <p:cNvPr id="25" name="Shape 23"/>
+          <p:cNvPr id="27" name="Shape 25"/>
           <p:cNvSpPr/>
           <p:nvPr/>
         </p:nvSpPr>
@@ -2975,7 +3131,7 @@
       </p:sp>
       <p:sp>
         <p:nvSpPr>
-          <p:cNvPr id="26" name="Shape 24"/>
+          <p:cNvPr id="28" name="Shape 26"/>
           <p:cNvSpPr/>
           <p:nvPr/>
         </p:nvSpPr>
@@ -3000,7 +3156,7 @@
       </p:sp>
       <p:sp>
         <p:nvSpPr>
-          <p:cNvPr id="27" name="Shape 25"/>
+          <p:cNvPr id="29" name="Shape 27"/>
           <p:cNvSpPr/>
           <p:nvPr/>
         </p:nvSpPr>
@@ -3025,7 +3181,7 @@
       </p:sp>
       <p:sp>
         <p:nvSpPr>
-          <p:cNvPr id="28" name="Text 26"/>
+          <p:cNvPr id="30" name="Text 28"/>
           <p:cNvSpPr/>
           <p:nvPr/>
         </p:nvSpPr>
@@ -3064,7 +3220,7 @@
       </p:sp>
       <p:sp>
         <p:nvSpPr>
-          <p:cNvPr id="29" name="Text 27"/>
+          <p:cNvPr id="31" name="Text 29"/>
           <p:cNvSpPr/>
           <p:nvPr/>
         </p:nvSpPr>
@@ -3103,7 +3259,7 @@
       </p:sp>
       <p:sp>
         <p:nvSpPr>
-          <p:cNvPr id="30" name="Text 28"/>
+          <p:cNvPr id="32" name="Text 30"/>
           <p:cNvSpPr/>
           <p:nvPr/>
         </p:nvSpPr>
@@ -3142,7 +3298,7 @@
       </p:sp>
       <p:sp>
         <p:nvSpPr>
-          <p:cNvPr id="31" name="Text 29"/>
+          <p:cNvPr id="33" name="Text 31"/>
           <p:cNvSpPr/>
           <p:nvPr/>
         </p:nvSpPr>
@@ -3181,7 +3337,7 @@
       </p:sp>
       <p:sp>
         <p:nvSpPr>
-          <p:cNvPr id="32" name="Text 30"/>
+          <p:cNvPr id="34" name="Text 32"/>
           <p:cNvSpPr/>
           <p:nvPr/>
         </p:nvSpPr>
@@ -3355,7 +3511,85 @@
       </p:sp>
       <p:sp>
         <p:nvSpPr>
-          <p:cNvPr id="5" name="Shape 3"/>
+          <p:cNvPr id="5" name="Text 3"/>
+          <p:cNvSpPr/>
+          <p:nvPr/>
+        </p:nvSpPr>
+        <p:spPr>
+          <a:xfrm>
+            <a:off x="411480" y="18288"/>
+            <a:ext cx="5852160" cy="164592"/>
+          </a:xfrm>
+          <a:prstGeom prst="rect">
+            <a:avLst/>
+          </a:prstGeom>
+          <a:noFill/>
+          <a:ln/>
+        </p:spPr>
+        <p:txBody>
+          <a:bodyPr wrap="square" lIns="0" tIns="0" rIns="0" bIns="0" rtlCol="0" anchor="ctr"/>
+          <a:lstStyle/>
+          <a:p>
+            <a:pPr indent="0" marL="0">
+              <a:buNone/>
+            </a:pPr>
+            <a:r>
+              <a:rPr lang="en-US" sz="800" b="1" dirty="0">
+                <a:solidFill>
+                  <a:srgbClr val="FECACA"/>
+                </a:solidFill>
+                <a:latin typeface="Calibri" pitchFamily="34" charset="0"/>
+                <a:ea typeface="Calibri" pitchFamily="34" charset="-122"/>
+                <a:cs typeface="Calibri" pitchFamily="34" charset="-120"/>
+              </a:rPr>
+              <a:t>LOCKHEED MARTIN PROPRIETARY INFORMATION</a:t>
+            </a:r>
+            <a:endParaRPr lang="en-US" sz="800" dirty="0"/>
+          </a:p>
+        </p:txBody>
+      </p:sp>
+      <p:sp>
+        <p:nvSpPr>
+          <p:cNvPr id="6" name="Text 4"/>
+          <p:cNvSpPr/>
+          <p:nvPr/>
+        </p:nvSpPr>
+        <p:spPr>
+          <a:xfrm>
+            <a:off x="411480" y="4919472"/>
+            <a:ext cx="7498080" cy="182880"/>
+          </a:xfrm>
+          <a:prstGeom prst="rect">
+            <a:avLst/>
+          </a:prstGeom>
+          <a:noFill/>
+          <a:ln/>
+        </p:spPr>
+        <p:txBody>
+          <a:bodyPr wrap="square" lIns="0" tIns="0" rIns="0" bIns="0" rtlCol="0" anchor="ctr"/>
+          <a:lstStyle/>
+          <a:p>
+            <a:pPr indent="0" marL="0">
+              <a:buNone/>
+            </a:pPr>
+            <a:r>
+              <a:rPr lang="en-US" sz="900" dirty="0">
+                <a:solidFill>
+                  <a:srgbClr val="94A3B8"/>
+                </a:solidFill>
+                <a:latin typeface="Calibri" pitchFamily="34" charset="0"/>
+                <a:ea typeface="Calibri" pitchFamily="34" charset="-122"/>
+                <a:cs typeface="Calibri" pitchFamily="34" charset="-120"/>
+              </a:rPr>
+              <a:t>Thomas Rathbun, PhD  ·  LOCKHEED MARTIN PROPRIETARY INFORMATION</a:t>
+            </a:r>
+            <a:endParaRPr lang="en-US" sz="900" dirty="0"/>
+          </a:p>
+        </p:txBody>
+      </p:sp>
+      <p:sp>
+        <p:nvSpPr>
+          <p:cNvPr id="7" name="Shape 5"/>
           <p:cNvSpPr/>
           <p:nvPr/>
         </p:nvSpPr>
@@ -3382,7 +3616,7 @@
       </p:sp>
       <p:sp>
         <p:nvSpPr>
-          <p:cNvPr id="6" name="Text 4"/>
+          <p:cNvPr id="8" name="Text 6"/>
           <p:cNvSpPr/>
           <p:nvPr/>
         </p:nvSpPr>
@@ -3421,7 +3655,7 @@
       </p:sp>
       <p:sp>
         <p:nvSpPr>
-          <p:cNvPr id="7" name="Shape 5"/>
+          <p:cNvPr id="9" name="Shape 7"/>
           <p:cNvSpPr/>
           <p:nvPr/>
         </p:nvSpPr>
@@ -3448,7 +3682,7 @@
       </p:sp>
       <p:sp>
         <p:nvSpPr>
-          <p:cNvPr id="8" name="Shape 6"/>
+          <p:cNvPr id="10" name="Shape 8"/>
           <p:cNvSpPr/>
           <p:nvPr/>
         </p:nvSpPr>
@@ -3473,7 +3707,7 @@
       </p:sp>
       <p:sp>
         <p:nvSpPr>
-          <p:cNvPr id="9" name="Text 7"/>
+          <p:cNvPr id="11" name="Text 9"/>
           <p:cNvSpPr/>
           <p:nvPr/>
         </p:nvSpPr>
@@ -3512,7 +3746,7 @@
       </p:sp>
       <p:sp>
         <p:nvSpPr>
-          <p:cNvPr id="10" name="Text 8"/>
+          <p:cNvPr id="12" name="Text 10"/>
           <p:cNvSpPr/>
           <p:nvPr/>
         </p:nvSpPr>
@@ -3588,7 +3822,7 @@
       </p:sp>
       <p:sp>
         <p:nvSpPr>
-          <p:cNvPr id="11" name="Shape 9"/>
+          <p:cNvPr id="13" name="Shape 11"/>
           <p:cNvSpPr/>
           <p:nvPr/>
         </p:nvSpPr>
@@ -3615,7 +3849,7 @@
       </p:sp>
       <p:sp>
         <p:nvSpPr>
-          <p:cNvPr id="12" name="Shape 10"/>
+          <p:cNvPr id="14" name="Shape 12"/>
           <p:cNvSpPr/>
           <p:nvPr/>
         </p:nvSpPr>
@@ -3640,7 +3874,7 @@
       </p:sp>
       <p:sp>
         <p:nvSpPr>
-          <p:cNvPr id="13" name="Text 11"/>
+          <p:cNvPr id="15" name="Text 13"/>
           <p:cNvSpPr/>
           <p:nvPr/>
         </p:nvSpPr>
@@ -3679,7 +3913,7 @@
       </p:sp>
       <p:sp>
         <p:nvSpPr>
-          <p:cNvPr id="14" name="Text 12"/>
+          <p:cNvPr id="16" name="Text 14"/>
           <p:cNvSpPr/>
           <p:nvPr/>
         </p:nvSpPr>
@@ -3755,7 +3989,7 @@
       </p:sp>
       <p:sp>
         <p:nvSpPr>
-          <p:cNvPr id="15" name="Shape 13"/>
+          <p:cNvPr id="17" name="Shape 15"/>
           <p:cNvSpPr/>
           <p:nvPr/>
         </p:nvSpPr>
@@ -3782,7 +4016,7 @@
       </p:sp>
       <p:sp>
         <p:nvSpPr>
-          <p:cNvPr id="16" name="Shape 14"/>
+          <p:cNvPr id="18" name="Shape 16"/>
           <p:cNvSpPr/>
           <p:nvPr/>
         </p:nvSpPr>
@@ -3807,7 +4041,7 @@
       </p:sp>
       <p:sp>
         <p:nvSpPr>
-          <p:cNvPr id="17" name="Text 15"/>
+          <p:cNvPr id="19" name="Text 17"/>
           <p:cNvSpPr/>
           <p:nvPr/>
         </p:nvSpPr>
@@ -3846,7 +4080,7 @@
       </p:sp>
       <p:sp>
         <p:nvSpPr>
-          <p:cNvPr id="18" name="Text 16"/>
+          <p:cNvPr id="20" name="Text 18"/>
           <p:cNvSpPr/>
           <p:nvPr/>
         </p:nvSpPr>
@@ -3922,7 +4156,7 @@
       </p:sp>
       <p:sp>
         <p:nvSpPr>
-          <p:cNvPr id="19" name="Text 17"/>
+          <p:cNvPr id="21" name="Text 19"/>
           <p:cNvSpPr/>
           <p:nvPr/>
         </p:nvSpPr>
@@ -4096,7 +4330,85 @@
       </p:sp>
       <p:sp>
         <p:nvSpPr>
-          <p:cNvPr id="5" name="Shape 3"/>
+          <p:cNvPr id="5" name="Text 3"/>
+          <p:cNvSpPr/>
+          <p:nvPr/>
+        </p:nvSpPr>
+        <p:spPr>
+          <a:xfrm>
+            <a:off x="411480" y="18288"/>
+            <a:ext cx="5852160" cy="164592"/>
+          </a:xfrm>
+          <a:prstGeom prst="rect">
+            <a:avLst/>
+          </a:prstGeom>
+          <a:noFill/>
+          <a:ln/>
+        </p:spPr>
+        <p:txBody>
+          <a:bodyPr wrap="square" lIns="0" tIns="0" rIns="0" bIns="0" rtlCol="0" anchor="ctr"/>
+          <a:lstStyle/>
+          <a:p>
+            <a:pPr indent="0" marL="0">
+              <a:buNone/>
+            </a:pPr>
+            <a:r>
+              <a:rPr lang="en-US" sz="800" b="1" dirty="0">
+                <a:solidFill>
+                  <a:srgbClr val="FECACA"/>
+                </a:solidFill>
+                <a:latin typeface="Calibri" pitchFamily="34" charset="0"/>
+                <a:ea typeface="Calibri" pitchFamily="34" charset="-122"/>
+                <a:cs typeface="Calibri" pitchFamily="34" charset="-120"/>
+              </a:rPr>
+              <a:t>LOCKHEED MARTIN PROPRIETARY INFORMATION</a:t>
+            </a:r>
+            <a:endParaRPr lang="en-US" sz="800" dirty="0"/>
+          </a:p>
+        </p:txBody>
+      </p:sp>
+      <p:sp>
+        <p:nvSpPr>
+          <p:cNvPr id="6" name="Text 4"/>
+          <p:cNvSpPr/>
+          <p:nvPr/>
+        </p:nvSpPr>
+        <p:spPr>
+          <a:xfrm>
+            <a:off x="411480" y="4919472"/>
+            <a:ext cx="7498080" cy="182880"/>
+          </a:xfrm>
+          <a:prstGeom prst="rect">
+            <a:avLst/>
+          </a:prstGeom>
+          <a:noFill/>
+          <a:ln/>
+        </p:spPr>
+        <p:txBody>
+          <a:bodyPr wrap="square" lIns="0" tIns="0" rIns="0" bIns="0" rtlCol="0" anchor="ctr"/>
+          <a:lstStyle/>
+          <a:p>
+            <a:pPr indent="0" marL="0">
+              <a:buNone/>
+            </a:pPr>
+            <a:r>
+              <a:rPr lang="en-US" sz="900" dirty="0">
+                <a:solidFill>
+                  <a:srgbClr val="94A3B8"/>
+                </a:solidFill>
+                <a:latin typeface="Calibri" pitchFamily="34" charset="0"/>
+                <a:ea typeface="Calibri" pitchFamily="34" charset="-122"/>
+                <a:cs typeface="Calibri" pitchFamily="34" charset="-120"/>
+              </a:rPr>
+              <a:t>Thomas Rathbun, PhD  ·  LOCKHEED MARTIN PROPRIETARY INFORMATION</a:t>
+            </a:r>
+            <a:endParaRPr lang="en-US" sz="900" dirty="0"/>
+          </a:p>
+        </p:txBody>
+      </p:sp>
+      <p:sp>
+        <p:nvSpPr>
+          <p:cNvPr id="7" name="Shape 5"/>
           <p:cNvSpPr/>
           <p:nvPr/>
         </p:nvSpPr>
@@ -4123,7 +4435,7 @@
       </p:sp>
       <p:sp>
         <p:nvSpPr>
-          <p:cNvPr id="6" name="Text 4"/>
+          <p:cNvPr id="8" name="Text 6"/>
           <p:cNvSpPr/>
           <p:nvPr/>
         </p:nvSpPr>
@@ -4162,7 +4474,7 @@
       </p:sp>
       <p:sp>
         <p:nvSpPr>
-          <p:cNvPr id="7" name="Text 5"/>
+          <p:cNvPr id="9" name="Text 7"/>
           <p:cNvSpPr/>
           <p:nvPr/>
         </p:nvSpPr>
@@ -4201,7 +4513,7 @@
       </p:sp>
       <p:sp>
         <p:nvSpPr>
-          <p:cNvPr id="8" name="Text 6"/>
+          <p:cNvPr id="10" name="Text 8"/>
           <p:cNvSpPr/>
           <p:nvPr/>
         </p:nvSpPr>
@@ -4240,7 +4552,7 @@
       </p:sp>
       <p:sp>
         <p:nvSpPr>
-          <p:cNvPr id="9" name="Shape 7"/>
+          <p:cNvPr id="11" name="Shape 9"/>
           <p:cNvSpPr/>
           <p:nvPr/>
         </p:nvSpPr>
@@ -4267,7 +4579,7 @@
       </p:sp>
       <p:sp>
         <p:nvSpPr>
-          <p:cNvPr id="10" name="Text 8"/>
+          <p:cNvPr id="12" name="Text 10"/>
           <p:cNvSpPr/>
           <p:nvPr/>
         </p:nvSpPr>
@@ -4306,7 +4618,7 @@
       </p:sp>
       <p:sp>
         <p:nvSpPr>
-          <p:cNvPr id="11" name="Text 9"/>
+          <p:cNvPr id="13" name="Text 11"/>
           <p:cNvSpPr/>
           <p:nvPr/>
         </p:nvSpPr>
@@ -4345,7 +4657,7 @@
       </p:sp>
       <p:sp>
         <p:nvSpPr>
-          <p:cNvPr id="12" name="Text 10"/>
+          <p:cNvPr id="14" name="Text 12"/>
           <p:cNvSpPr/>
           <p:nvPr/>
         </p:nvSpPr>
@@ -4384,7 +4696,7 @@
       </p:sp>
       <p:sp>
         <p:nvSpPr>
-          <p:cNvPr id="13" name="Shape 11"/>
+          <p:cNvPr id="15" name="Shape 13"/>
           <p:cNvSpPr/>
           <p:nvPr/>
         </p:nvSpPr>
@@ -4411,7 +4723,7 @@
       </p:sp>
       <p:sp>
         <p:nvSpPr>
-          <p:cNvPr id="14" name="Text 12"/>
+          <p:cNvPr id="16" name="Text 14"/>
           <p:cNvSpPr/>
           <p:nvPr/>
         </p:nvSpPr>
@@ -4450,7 +4762,7 @@
       </p:sp>
       <p:sp>
         <p:nvSpPr>
-          <p:cNvPr id="15" name="Text 13"/>
+          <p:cNvPr id="17" name="Text 15"/>
           <p:cNvSpPr/>
           <p:nvPr/>
         </p:nvSpPr>
@@ -4489,7 +4801,7 @@
       </p:sp>
       <p:sp>
         <p:nvSpPr>
-          <p:cNvPr id="16" name="Text 14"/>
+          <p:cNvPr id="18" name="Text 16"/>
           <p:cNvSpPr/>
           <p:nvPr/>
         </p:nvSpPr>
@@ -4528,7 +4840,7 @@
       </p:sp>
       <p:sp>
         <p:nvSpPr>
-          <p:cNvPr id="17" name="Shape 15"/>
+          <p:cNvPr id="19" name="Shape 17"/>
           <p:cNvSpPr/>
           <p:nvPr/>
         </p:nvSpPr>
@@ -4555,7 +4867,7 @@
       </p:sp>
       <p:sp>
         <p:nvSpPr>
-          <p:cNvPr id="18" name="Text 16"/>
+          <p:cNvPr id="20" name="Text 18"/>
           <p:cNvSpPr/>
           <p:nvPr/>
         </p:nvSpPr>
@@ -4594,7 +4906,7 @@
       </p:sp>
       <p:sp>
         <p:nvSpPr>
-          <p:cNvPr id="19" name="Text 17"/>
+          <p:cNvPr id="21" name="Text 19"/>
           <p:cNvSpPr/>
           <p:nvPr/>
         </p:nvSpPr>
@@ -4633,7 +4945,7 @@
       </p:sp>
       <p:sp>
         <p:nvSpPr>
-          <p:cNvPr id="20" name="Text 18"/>
+          <p:cNvPr id="22" name="Text 20"/>
           <p:cNvSpPr/>
           <p:nvPr/>
         </p:nvSpPr>
@@ -4672,7 +4984,7 @@
       </p:sp>
       <p:sp>
         <p:nvSpPr>
-          <p:cNvPr id="21" name="Shape 19"/>
+          <p:cNvPr id="23" name="Shape 21"/>
           <p:cNvSpPr/>
           <p:nvPr/>
         </p:nvSpPr>
@@ -4699,7 +5011,7 @@
       </p:sp>
       <p:sp>
         <p:nvSpPr>
-          <p:cNvPr id="22" name="Text 20"/>
+          <p:cNvPr id="24" name="Text 22"/>
           <p:cNvSpPr/>
           <p:nvPr/>
         </p:nvSpPr>
@@ -4738,7 +5050,7 @@
       </p:sp>
       <p:sp>
         <p:nvSpPr>
-          <p:cNvPr id="23" name="Text 21"/>
+          <p:cNvPr id="25" name="Text 23"/>
           <p:cNvSpPr/>
           <p:nvPr/>
         </p:nvSpPr>
@@ -4777,7 +5089,7 @@
       </p:sp>
       <p:sp>
         <p:nvSpPr>
-          <p:cNvPr id="24" name="Text 22"/>
+          <p:cNvPr id="26" name="Text 24"/>
           <p:cNvSpPr/>
           <p:nvPr/>
         </p:nvSpPr>
@@ -4816,7 +5128,7 @@
       </p:sp>
       <p:sp>
         <p:nvSpPr>
-          <p:cNvPr id="25" name="Shape 23"/>
+          <p:cNvPr id="27" name="Shape 25"/>
           <p:cNvSpPr/>
           <p:nvPr/>
         </p:nvSpPr>
@@ -4843,7 +5155,7 @@
       </p:sp>
       <p:sp>
         <p:nvSpPr>
-          <p:cNvPr id="26" name="Text 24"/>
+          <p:cNvPr id="28" name="Text 26"/>
           <p:cNvSpPr/>
           <p:nvPr/>
         </p:nvSpPr>
@@ -4882,7 +5194,7 @@
       </p:sp>
       <p:sp>
         <p:nvSpPr>
-          <p:cNvPr id="27" name="Text 25"/>
+          <p:cNvPr id="29" name="Text 27"/>
           <p:cNvSpPr/>
           <p:nvPr/>
         </p:nvSpPr>
@@ -4921,7 +5233,7 @@
       </p:sp>
       <p:sp>
         <p:nvSpPr>
-          <p:cNvPr id="28" name="Text 26"/>
+          <p:cNvPr id="30" name="Text 28"/>
           <p:cNvSpPr/>
           <p:nvPr/>
         </p:nvSpPr>
@@ -4960,7 +5272,7 @@
       </p:sp>
       <p:sp>
         <p:nvSpPr>
-          <p:cNvPr id="29" name="Text 27"/>
+          <p:cNvPr id="31" name="Text 29"/>
           <p:cNvSpPr/>
           <p:nvPr/>
         </p:nvSpPr>
@@ -5134,7 +5446,85 @@
       </p:sp>
       <p:sp>
         <p:nvSpPr>
-          <p:cNvPr id="5" name="Shape 3"/>
+          <p:cNvPr id="5" name="Text 3"/>
+          <p:cNvSpPr/>
+          <p:nvPr/>
+        </p:nvSpPr>
+        <p:spPr>
+          <a:xfrm>
+            <a:off x="411480" y="18288"/>
+            <a:ext cx="5852160" cy="164592"/>
+          </a:xfrm>
+          <a:prstGeom prst="rect">
+            <a:avLst/>
+          </a:prstGeom>
+          <a:noFill/>
+          <a:ln/>
+        </p:spPr>
+        <p:txBody>
+          <a:bodyPr wrap="square" lIns="0" tIns="0" rIns="0" bIns="0" rtlCol="0" anchor="ctr"/>
+          <a:lstStyle/>
+          <a:p>
+            <a:pPr indent="0" marL="0">
+              <a:buNone/>
+            </a:pPr>
+            <a:r>
+              <a:rPr lang="en-US" sz="800" b="1" dirty="0">
+                <a:solidFill>
+                  <a:srgbClr val="FECACA"/>
+                </a:solidFill>
+                <a:latin typeface="Calibri" pitchFamily="34" charset="0"/>
+                <a:ea typeface="Calibri" pitchFamily="34" charset="-122"/>
+                <a:cs typeface="Calibri" pitchFamily="34" charset="-120"/>
+              </a:rPr>
+              <a:t>LOCKHEED MARTIN PROPRIETARY INFORMATION</a:t>
+            </a:r>
+            <a:endParaRPr lang="en-US" sz="800" dirty="0"/>
+          </a:p>
+        </p:txBody>
+      </p:sp>
+      <p:sp>
+        <p:nvSpPr>
+          <p:cNvPr id="6" name="Text 4"/>
+          <p:cNvSpPr/>
+          <p:nvPr/>
+        </p:nvSpPr>
+        <p:spPr>
+          <a:xfrm>
+            <a:off x="411480" y="4919472"/>
+            <a:ext cx="7498080" cy="182880"/>
+          </a:xfrm>
+          <a:prstGeom prst="rect">
+            <a:avLst/>
+          </a:prstGeom>
+          <a:noFill/>
+          <a:ln/>
+        </p:spPr>
+        <p:txBody>
+          <a:bodyPr wrap="square" lIns="0" tIns="0" rIns="0" bIns="0" rtlCol="0" anchor="ctr"/>
+          <a:lstStyle/>
+          <a:p>
+            <a:pPr indent="0" marL="0">
+              <a:buNone/>
+            </a:pPr>
+            <a:r>
+              <a:rPr lang="en-US" sz="900" dirty="0">
+                <a:solidFill>
+                  <a:srgbClr val="94A3B8"/>
+                </a:solidFill>
+                <a:latin typeface="Calibri" pitchFamily="34" charset="0"/>
+                <a:ea typeface="Calibri" pitchFamily="34" charset="-122"/>
+                <a:cs typeface="Calibri" pitchFamily="34" charset="-120"/>
+              </a:rPr>
+              <a:t>Thomas Rathbun, PhD  ·  LOCKHEED MARTIN PROPRIETARY INFORMATION</a:t>
+            </a:r>
+            <a:endParaRPr lang="en-US" sz="900" dirty="0"/>
+          </a:p>
+        </p:txBody>
+      </p:sp>
+      <p:sp>
+        <p:nvSpPr>
+          <p:cNvPr id="7" name="Shape 5"/>
           <p:cNvSpPr/>
           <p:nvPr/>
         </p:nvSpPr>
@@ -5161,7 +5551,7 @@
       </p:sp>
       <p:sp>
         <p:nvSpPr>
-          <p:cNvPr id="6" name="Shape 4"/>
+          <p:cNvPr id="8" name="Shape 6"/>
           <p:cNvSpPr/>
           <p:nvPr/>
         </p:nvSpPr>
@@ -5186,7 +5576,7 @@
       </p:sp>
       <p:sp>
         <p:nvSpPr>
-          <p:cNvPr id="7" name="Text 5"/>
+          <p:cNvPr id="9" name="Text 7"/>
           <p:cNvSpPr/>
           <p:nvPr/>
         </p:nvSpPr>
@@ -5225,7 +5615,7 @@
       </p:sp>
       <p:sp>
         <p:nvSpPr>
-          <p:cNvPr id="8" name="Text 6"/>
+          <p:cNvPr id="10" name="Text 8"/>
           <p:cNvSpPr/>
           <p:nvPr/>
         </p:nvSpPr>
@@ -5301,7 +5691,7 @@
       </p:sp>
       <p:sp>
         <p:nvSpPr>
-          <p:cNvPr id="9" name="Shape 7"/>
+          <p:cNvPr id="11" name="Shape 9"/>
           <p:cNvSpPr/>
           <p:nvPr/>
         </p:nvSpPr>
@@ -5328,7 +5718,7 @@
       </p:sp>
       <p:sp>
         <p:nvSpPr>
-          <p:cNvPr id="10" name="Shape 8"/>
+          <p:cNvPr id="12" name="Shape 10"/>
           <p:cNvSpPr/>
           <p:nvPr/>
         </p:nvSpPr>
@@ -5353,7 +5743,7 @@
       </p:sp>
       <p:sp>
         <p:nvSpPr>
-          <p:cNvPr id="11" name="Text 9"/>
+          <p:cNvPr id="13" name="Text 11"/>
           <p:cNvSpPr/>
           <p:nvPr/>
         </p:nvSpPr>
@@ -5392,7 +5782,7 @@
       </p:sp>
       <p:sp>
         <p:nvSpPr>
-          <p:cNvPr id="12" name="Text 10"/>
+          <p:cNvPr id="14" name="Text 12"/>
           <p:cNvSpPr/>
           <p:nvPr/>
         </p:nvSpPr>
@@ -5468,7 +5858,7 @@
       </p:sp>
       <p:sp>
         <p:nvSpPr>
-          <p:cNvPr id="13" name="Shape 11"/>
+          <p:cNvPr id="15" name="Shape 13"/>
           <p:cNvSpPr/>
           <p:nvPr/>
         </p:nvSpPr>
@@ -5495,7 +5885,7 @@
       </p:sp>
       <p:sp>
         <p:nvSpPr>
-          <p:cNvPr id="14" name="Shape 12"/>
+          <p:cNvPr id="16" name="Shape 14"/>
           <p:cNvSpPr/>
           <p:nvPr/>
         </p:nvSpPr>
@@ -5520,7 +5910,7 @@
       </p:sp>
       <p:sp>
         <p:nvSpPr>
-          <p:cNvPr id="15" name="Text 13"/>
+          <p:cNvPr id="17" name="Text 15"/>
           <p:cNvSpPr/>
           <p:nvPr/>
         </p:nvSpPr>
@@ -5559,7 +5949,7 @@
       </p:sp>
       <p:sp>
         <p:nvSpPr>
-          <p:cNvPr id="16" name="Text 14"/>
+          <p:cNvPr id="18" name="Text 16"/>
           <p:cNvSpPr/>
           <p:nvPr/>
         </p:nvSpPr>
@@ -5635,7 +6025,7 @@
       </p:sp>
       <p:sp>
         <p:nvSpPr>
-          <p:cNvPr id="17" name="Shape 15"/>
+          <p:cNvPr id="19" name="Shape 17"/>
           <p:cNvSpPr/>
           <p:nvPr/>
         </p:nvSpPr>
@@ -5662,7 +6052,7 @@
       </p:sp>
       <p:sp>
         <p:nvSpPr>
-          <p:cNvPr id="18" name="Text 16"/>
+          <p:cNvPr id="20" name="Text 18"/>
           <p:cNvSpPr/>
           <p:nvPr/>
         </p:nvSpPr>
@@ -5701,7 +6091,7 @@
       </p:sp>
       <p:sp>
         <p:nvSpPr>
-          <p:cNvPr id="19" name="Text 17"/>
+          <p:cNvPr id="21" name="Text 19"/>
           <p:cNvSpPr/>
           <p:nvPr/>
         </p:nvSpPr>
@@ -5740,7 +6130,7 @@
       </p:sp>
       <p:sp>
         <p:nvSpPr>
-          <p:cNvPr id="20" name="Text 18"/>
+          <p:cNvPr id="22" name="Text 20"/>
           <p:cNvSpPr/>
           <p:nvPr/>
         </p:nvSpPr>
@@ -5914,7 +6304,85 @@
       </p:sp>
       <p:sp>
         <p:nvSpPr>
-          <p:cNvPr id="5" name="Shape 3"/>
+          <p:cNvPr id="5" name="Text 3"/>
+          <p:cNvSpPr/>
+          <p:nvPr/>
+        </p:nvSpPr>
+        <p:spPr>
+          <a:xfrm>
+            <a:off x="411480" y="18288"/>
+            <a:ext cx="5852160" cy="164592"/>
+          </a:xfrm>
+          <a:prstGeom prst="rect">
+            <a:avLst/>
+          </a:prstGeom>
+          <a:noFill/>
+          <a:ln/>
+        </p:spPr>
+        <p:txBody>
+          <a:bodyPr wrap="square" lIns="0" tIns="0" rIns="0" bIns="0" rtlCol="0" anchor="ctr"/>
+          <a:lstStyle/>
+          <a:p>
+            <a:pPr indent="0" marL="0">
+              <a:buNone/>
+            </a:pPr>
+            <a:r>
+              <a:rPr lang="en-US" sz="800" b="1" dirty="0">
+                <a:solidFill>
+                  <a:srgbClr val="FECACA"/>
+                </a:solidFill>
+                <a:latin typeface="Calibri" pitchFamily="34" charset="0"/>
+                <a:ea typeface="Calibri" pitchFamily="34" charset="-122"/>
+                <a:cs typeface="Calibri" pitchFamily="34" charset="-120"/>
+              </a:rPr>
+              <a:t>LOCKHEED MARTIN PROPRIETARY INFORMATION</a:t>
+            </a:r>
+            <a:endParaRPr lang="en-US" sz="800" dirty="0"/>
+          </a:p>
+        </p:txBody>
+      </p:sp>
+      <p:sp>
+        <p:nvSpPr>
+          <p:cNvPr id="6" name="Text 4"/>
+          <p:cNvSpPr/>
+          <p:nvPr/>
+        </p:nvSpPr>
+        <p:spPr>
+          <a:xfrm>
+            <a:off x="411480" y="4919472"/>
+            <a:ext cx="7498080" cy="182880"/>
+          </a:xfrm>
+          <a:prstGeom prst="rect">
+            <a:avLst/>
+          </a:prstGeom>
+          <a:noFill/>
+          <a:ln/>
+        </p:spPr>
+        <p:txBody>
+          <a:bodyPr wrap="square" lIns="0" tIns="0" rIns="0" bIns="0" rtlCol="0" anchor="ctr"/>
+          <a:lstStyle/>
+          <a:p>
+            <a:pPr indent="0" marL="0">
+              <a:buNone/>
+            </a:pPr>
+            <a:r>
+              <a:rPr lang="en-US" sz="900" dirty="0">
+                <a:solidFill>
+                  <a:srgbClr val="94A3B8"/>
+                </a:solidFill>
+                <a:latin typeface="Calibri" pitchFamily="34" charset="0"/>
+                <a:ea typeface="Calibri" pitchFamily="34" charset="-122"/>
+                <a:cs typeface="Calibri" pitchFamily="34" charset="-120"/>
+              </a:rPr>
+              <a:t>Thomas Rathbun, PhD  ·  LOCKHEED MARTIN PROPRIETARY INFORMATION</a:t>
+            </a:r>
+            <a:endParaRPr lang="en-US" sz="900" dirty="0"/>
+          </a:p>
+        </p:txBody>
+      </p:sp>
+      <p:sp>
+        <p:nvSpPr>
+          <p:cNvPr id="7" name="Shape 5"/>
           <p:cNvSpPr/>
           <p:nvPr/>
         </p:nvSpPr>
@@ -5941,7 +6409,7 @@
       </p:sp>
       <p:sp>
         <p:nvSpPr>
-          <p:cNvPr id="6" name="Shape 4"/>
+          <p:cNvPr id="8" name="Shape 6"/>
           <p:cNvSpPr/>
           <p:nvPr/>
         </p:nvSpPr>
@@ -5966,7 +6434,7 @@
       </p:sp>
       <p:sp>
         <p:nvSpPr>
-          <p:cNvPr id="7" name="Text 5"/>
+          <p:cNvPr id="9" name="Text 7"/>
           <p:cNvSpPr/>
           <p:nvPr/>
         </p:nvSpPr>
@@ -6005,7 +6473,7 @@
       </p:sp>
       <p:sp>
         <p:nvSpPr>
-          <p:cNvPr id="8" name="Text 6"/>
+          <p:cNvPr id="10" name="Text 8"/>
           <p:cNvSpPr/>
           <p:nvPr/>
         </p:nvSpPr>
@@ -6044,7 +6512,7 @@
       </p:sp>
       <p:sp>
         <p:nvSpPr>
-          <p:cNvPr id="9" name="Shape 7"/>
+          <p:cNvPr id="11" name="Shape 9"/>
           <p:cNvSpPr/>
           <p:nvPr/>
         </p:nvSpPr>
@@ -6071,7 +6539,7 @@
       </p:sp>
       <p:sp>
         <p:nvSpPr>
-          <p:cNvPr id="10" name="Shape 8"/>
+          <p:cNvPr id="12" name="Shape 10"/>
           <p:cNvSpPr/>
           <p:nvPr/>
         </p:nvSpPr>
@@ -6096,7 +6564,7 @@
       </p:sp>
       <p:sp>
         <p:nvSpPr>
-          <p:cNvPr id="11" name="Text 9"/>
+          <p:cNvPr id="13" name="Text 11"/>
           <p:cNvSpPr/>
           <p:nvPr/>
         </p:nvSpPr>
@@ -6135,7 +6603,7 @@
       </p:sp>
       <p:sp>
         <p:nvSpPr>
-          <p:cNvPr id="12" name="Text 10"/>
+          <p:cNvPr id="14" name="Text 12"/>
           <p:cNvSpPr/>
           <p:nvPr/>
         </p:nvSpPr>
@@ -6174,7 +6642,7 @@
       </p:sp>
       <p:sp>
         <p:nvSpPr>
-          <p:cNvPr id="13" name="Text 11"/>
+          <p:cNvPr id="15" name="Text 13"/>
           <p:cNvSpPr/>
           <p:nvPr/>
         </p:nvSpPr>
@@ -6213,7 +6681,7 @@
       </p:sp>
       <p:sp>
         <p:nvSpPr>
-          <p:cNvPr id="14" name="Text 12"/>
+          <p:cNvPr id="16" name="Text 14"/>
           <p:cNvSpPr/>
           <p:nvPr/>
         </p:nvSpPr>
@@ -6252,7 +6720,7 @@
       </p:sp>
       <p:sp>
         <p:nvSpPr>
-          <p:cNvPr id="15" name="Shape 13"/>
+          <p:cNvPr id="17" name="Shape 15"/>
           <p:cNvSpPr/>
           <p:nvPr/>
         </p:nvSpPr>
@@ -6279,7 +6747,7 @@
       </p:sp>
       <p:sp>
         <p:nvSpPr>
-          <p:cNvPr id="16" name="Shape 14"/>
+          <p:cNvPr id="18" name="Shape 16"/>
           <p:cNvSpPr/>
           <p:nvPr/>
         </p:nvSpPr>
@@ -6304,7 +6772,7 @@
       </p:sp>
       <p:sp>
         <p:nvSpPr>
-          <p:cNvPr id="17" name="Text 15"/>
+          <p:cNvPr id="19" name="Text 17"/>
           <p:cNvSpPr/>
           <p:nvPr/>
         </p:nvSpPr>
@@ -6343,7 +6811,7 @@
       </p:sp>
       <p:sp>
         <p:nvSpPr>
-          <p:cNvPr id="18" name="Text 16"/>
+          <p:cNvPr id="20" name="Text 18"/>
           <p:cNvSpPr/>
           <p:nvPr/>
         </p:nvSpPr>
@@ -6382,7 +6850,7 @@
       </p:sp>
       <p:sp>
         <p:nvSpPr>
-          <p:cNvPr id="19" name="Text 17"/>
+          <p:cNvPr id="21" name="Text 19"/>
           <p:cNvSpPr/>
           <p:nvPr/>
         </p:nvSpPr>
@@ -6421,7 +6889,7 @@
       </p:sp>
       <p:sp>
         <p:nvSpPr>
-          <p:cNvPr id="20" name="Text 18"/>
+          <p:cNvPr id="22" name="Text 20"/>
           <p:cNvSpPr/>
           <p:nvPr/>
         </p:nvSpPr>
@@ -6460,7 +6928,7 @@
       </p:sp>
       <p:sp>
         <p:nvSpPr>
-          <p:cNvPr id="21" name="Shape 19"/>
+          <p:cNvPr id="23" name="Shape 21"/>
           <p:cNvSpPr/>
           <p:nvPr/>
         </p:nvSpPr>
@@ -6487,7 +6955,7 @@
       </p:sp>
       <p:sp>
         <p:nvSpPr>
-          <p:cNvPr id="22" name="Shape 20"/>
+          <p:cNvPr id="24" name="Shape 22"/>
           <p:cNvSpPr/>
           <p:nvPr/>
         </p:nvSpPr>
@@ -6512,7 +6980,7 @@
       </p:sp>
       <p:sp>
         <p:nvSpPr>
-          <p:cNvPr id="23" name="Text 21"/>
+          <p:cNvPr id="25" name="Text 23"/>
           <p:cNvSpPr/>
           <p:nvPr/>
         </p:nvSpPr>
@@ -6551,7 +7019,7 @@
       </p:sp>
       <p:sp>
         <p:nvSpPr>
-          <p:cNvPr id="24" name="Text 22"/>
+          <p:cNvPr id="26" name="Text 24"/>
           <p:cNvSpPr/>
           <p:nvPr/>
         </p:nvSpPr>
@@ -6590,7 +7058,7 @@
       </p:sp>
       <p:sp>
         <p:nvSpPr>
-          <p:cNvPr id="25" name="Text 23"/>
+          <p:cNvPr id="27" name="Text 25"/>
           <p:cNvSpPr/>
           <p:nvPr/>
         </p:nvSpPr>
@@ -6629,7 +7097,7 @@
       </p:sp>
       <p:sp>
         <p:nvSpPr>
-          <p:cNvPr id="26" name="Text 24"/>
+          <p:cNvPr id="28" name="Text 26"/>
           <p:cNvSpPr/>
           <p:nvPr/>
         </p:nvSpPr>
@@ -6668,7 +7136,7 @@
       </p:sp>
       <p:sp>
         <p:nvSpPr>
-          <p:cNvPr id="27" name="Shape 25"/>
+          <p:cNvPr id="29" name="Shape 27"/>
           <p:cNvSpPr/>
           <p:nvPr/>
         </p:nvSpPr>
@@ -6695,7 +7163,7 @@
       </p:sp>
       <p:sp>
         <p:nvSpPr>
-          <p:cNvPr id="28" name="Shape 26"/>
+          <p:cNvPr id="30" name="Shape 28"/>
           <p:cNvSpPr/>
           <p:nvPr/>
         </p:nvSpPr>
@@ -6720,7 +7188,7 @@
       </p:sp>
       <p:sp>
         <p:nvSpPr>
-          <p:cNvPr id="29" name="Text 27"/>
+          <p:cNvPr id="31" name="Text 29"/>
           <p:cNvSpPr/>
           <p:nvPr/>
         </p:nvSpPr>
@@ -6759,7 +7227,7 @@
       </p:sp>
       <p:sp>
         <p:nvSpPr>
-          <p:cNvPr id="30" name="Text 28"/>
+          <p:cNvPr id="32" name="Text 30"/>
           <p:cNvSpPr/>
           <p:nvPr/>
         </p:nvSpPr>
@@ -6798,7 +7266,7 @@
       </p:sp>
       <p:sp>
         <p:nvSpPr>
-          <p:cNvPr id="31" name="Text 29"/>
+          <p:cNvPr id="33" name="Text 31"/>
           <p:cNvSpPr/>
           <p:nvPr/>
         </p:nvSpPr>
@@ -6837,7 +7305,7 @@
       </p:sp>
       <p:sp>
         <p:nvSpPr>
-          <p:cNvPr id="32" name="Text 30"/>
+          <p:cNvPr id="34" name="Text 32"/>
           <p:cNvSpPr/>
           <p:nvPr/>
         </p:nvSpPr>
@@ -6876,7 +7344,7 @@
       </p:sp>
       <p:sp>
         <p:nvSpPr>
-          <p:cNvPr id="33" name="Text 31"/>
+          <p:cNvPr id="35" name="Text 33"/>
           <p:cNvSpPr/>
           <p:nvPr/>
         </p:nvSpPr>
@@ -7050,7 +7518,85 @@
       </p:sp>
       <p:sp>
         <p:nvSpPr>
-          <p:cNvPr id="5" name="Shape 3"/>
+          <p:cNvPr id="5" name="Text 3"/>
+          <p:cNvSpPr/>
+          <p:nvPr/>
+        </p:nvSpPr>
+        <p:spPr>
+          <a:xfrm>
+            <a:off x="411480" y="18288"/>
+            <a:ext cx="5852160" cy="164592"/>
+          </a:xfrm>
+          <a:prstGeom prst="rect">
+            <a:avLst/>
+          </a:prstGeom>
+          <a:noFill/>
+          <a:ln/>
+        </p:spPr>
+        <p:txBody>
+          <a:bodyPr wrap="square" lIns="0" tIns="0" rIns="0" bIns="0" rtlCol="0" anchor="ctr"/>
+          <a:lstStyle/>
+          <a:p>
+            <a:pPr indent="0" marL="0">
+              <a:buNone/>
+            </a:pPr>
+            <a:r>
+              <a:rPr lang="en-US" sz="800" b="1" dirty="0">
+                <a:solidFill>
+                  <a:srgbClr val="FECACA"/>
+                </a:solidFill>
+                <a:latin typeface="Calibri" pitchFamily="34" charset="0"/>
+                <a:ea typeface="Calibri" pitchFamily="34" charset="-122"/>
+                <a:cs typeface="Calibri" pitchFamily="34" charset="-120"/>
+              </a:rPr>
+              <a:t>LOCKHEED MARTIN PROPRIETARY INFORMATION</a:t>
+            </a:r>
+            <a:endParaRPr lang="en-US" sz="800" dirty="0"/>
+          </a:p>
+        </p:txBody>
+      </p:sp>
+      <p:sp>
+        <p:nvSpPr>
+          <p:cNvPr id="6" name="Text 4"/>
+          <p:cNvSpPr/>
+          <p:nvPr/>
+        </p:nvSpPr>
+        <p:spPr>
+          <a:xfrm>
+            <a:off x="411480" y="4919472"/>
+            <a:ext cx="7498080" cy="182880"/>
+          </a:xfrm>
+          <a:prstGeom prst="rect">
+            <a:avLst/>
+          </a:prstGeom>
+          <a:noFill/>
+          <a:ln/>
+        </p:spPr>
+        <p:txBody>
+          <a:bodyPr wrap="square" lIns="0" tIns="0" rIns="0" bIns="0" rtlCol="0" anchor="ctr"/>
+          <a:lstStyle/>
+          <a:p>
+            <a:pPr indent="0" marL="0">
+              <a:buNone/>
+            </a:pPr>
+            <a:r>
+              <a:rPr lang="en-US" sz="900" dirty="0">
+                <a:solidFill>
+                  <a:srgbClr val="94A3B8"/>
+                </a:solidFill>
+                <a:latin typeface="Calibri" pitchFamily="34" charset="0"/>
+                <a:ea typeface="Calibri" pitchFamily="34" charset="-122"/>
+                <a:cs typeface="Calibri" pitchFamily="34" charset="-120"/>
+              </a:rPr>
+              <a:t>Thomas Rathbun, PhD  ·  LOCKHEED MARTIN PROPRIETARY INFORMATION</a:t>
+            </a:r>
+            <a:endParaRPr lang="en-US" sz="900" dirty="0"/>
+          </a:p>
+        </p:txBody>
+      </p:sp>
+      <p:sp>
+        <p:nvSpPr>
+          <p:cNvPr id="7" name="Shape 5"/>
           <p:cNvSpPr/>
           <p:nvPr/>
         </p:nvSpPr>
@@ -7077,7 +7623,7 @@
       </p:sp>
       <p:sp>
         <p:nvSpPr>
-          <p:cNvPr id="6" name="Shape 4"/>
+          <p:cNvPr id="8" name="Shape 6"/>
           <p:cNvSpPr/>
           <p:nvPr/>
         </p:nvSpPr>
@@ -7104,7 +7650,7 @@
       </p:sp>
       <p:sp>
         <p:nvSpPr>
-          <p:cNvPr id="7" name="Text 5"/>
+          <p:cNvPr id="9" name="Text 7"/>
           <p:cNvSpPr/>
           <p:nvPr/>
         </p:nvSpPr>
@@ -7143,7 +7689,7 @@
       </p:sp>
       <p:sp>
         <p:nvSpPr>
-          <p:cNvPr id="8" name="Text 6"/>
+          <p:cNvPr id="10" name="Text 8"/>
           <p:cNvSpPr/>
           <p:nvPr/>
         </p:nvSpPr>
@@ -7182,7 +7728,7 @@
       </p:sp>
       <p:sp>
         <p:nvSpPr>
-          <p:cNvPr id="9" name="Text 7"/>
+          <p:cNvPr id="11" name="Text 9"/>
           <p:cNvSpPr/>
           <p:nvPr/>
         </p:nvSpPr>
@@ -7221,7 +7767,7 @@
       </p:sp>
       <p:sp>
         <p:nvSpPr>
-          <p:cNvPr id="10" name="Shape 8"/>
+          <p:cNvPr id="12" name="Shape 10"/>
           <p:cNvSpPr/>
           <p:nvPr/>
         </p:nvSpPr>
@@ -7248,7 +7794,7 @@
       </p:sp>
       <p:sp>
         <p:nvSpPr>
-          <p:cNvPr id="11" name="Shape 9"/>
+          <p:cNvPr id="13" name="Shape 11"/>
           <p:cNvSpPr/>
           <p:nvPr/>
         </p:nvSpPr>
@@ -7275,7 +7821,7 @@
       </p:sp>
       <p:sp>
         <p:nvSpPr>
-          <p:cNvPr id="12" name="Text 10"/>
+          <p:cNvPr id="14" name="Text 12"/>
           <p:cNvSpPr/>
           <p:nvPr/>
         </p:nvSpPr>
@@ -7314,7 +7860,7 @@
       </p:sp>
       <p:sp>
         <p:nvSpPr>
-          <p:cNvPr id="13" name="Text 11"/>
+          <p:cNvPr id="15" name="Text 13"/>
           <p:cNvSpPr/>
           <p:nvPr/>
         </p:nvSpPr>
@@ -7353,7 +7899,7 @@
       </p:sp>
       <p:sp>
         <p:nvSpPr>
-          <p:cNvPr id="14" name="Text 12"/>
+          <p:cNvPr id="16" name="Text 14"/>
           <p:cNvSpPr/>
           <p:nvPr/>
         </p:nvSpPr>
@@ -7392,7 +7938,7 @@
       </p:sp>
       <p:sp>
         <p:nvSpPr>
-          <p:cNvPr id="15" name="Shape 13"/>
+          <p:cNvPr id="17" name="Shape 15"/>
           <p:cNvSpPr/>
           <p:nvPr/>
         </p:nvSpPr>
@@ -7419,7 +7965,7 @@
       </p:sp>
       <p:sp>
         <p:nvSpPr>
-          <p:cNvPr id="16" name="Shape 14"/>
+          <p:cNvPr id="18" name="Shape 16"/>
           <p:cNvSpPr/>
           <p:nvPr/>
         </p:nvSpPr>
@@ -7446,7 +7992,7 @@
       </p:sp>
       <p:sp>
         <p:nvSpPr>
-          <p:cNvPr id="17" name="Text 15"/>
+          <p:cNvPr id="19" name="Text 17"/>
           <p:cNvSpPr/>
           <p:nvPr/>
         </p:nvSpPr>
@@ -7485,7 +8031,7 @@
       </p:sp>
       <p:sp>
         <p:nvSpPr>
-          <p:cNvPr id="18" name="Text 16"/>
+          <p:cNvPr id="20" name="Text 18"/>
           <p:cNvSpPr/>
           <p:nvPr/>
         </p:nvSpPr>
@@ -7524,7 +8070,7 @@
       </p:sp>
       <p:sp>
         <p:nvSpPr>
-          <p:cNvPr id="19" name="Text 17"/>
+          <p:cNvPr id="21" name="Text 19"/>
           <p:cNvSpPr/>
           <p:nvPr/>
         </p:nvSpPr>
@@ -7563,7 +8109,7 @@
       </p:sp>
       <p:sp>
         <p:nvSpPr>
-          <p:cNvPr id="20" name="Shape 18"/>
+          <p:cNvPr id="22" name="Shape 20"/>
           <p:cNvSpPr/>
           <p:nvPr/>
         </p:nvSpPr>
@@ -7590,7 +8136,7 @@
       </p:sp>
       <p:sp>
         <p:nvSpPr>
-          <p:cNvPr id="21" name="Shape 19"/>
+          <p:cNvPr id="23" name="Shape 21"/>
           <p:cNvSpPr/>
           <p:nvPr/>
         </p:nvSpPr>
@@ -7617,7 +8163,7 @@
       </p:sp>
       <p:sp>
         <p:nvSpPr>
-          <p:cNvPr id="22" name="Text 20"/>
+          <p:cNvPr id="24" name="Text 22"/>
           <p:cNvSpPr/>
           <p:nvPr/>
         </p:nvSpPr>
@@ -7656,7 +8202,7 @@
       </p:sp>
       <p:sp>
         <p:nvSpPr>
-          <p:cNvPr id="23" name="Text 21"/>
+          <p:cNvPr id="25" name="Text 23"/>
           <p:cNvSpPr/>
           <p:nvPr/>
         </p:nvSpPr>
@@ -7695,7 +8241,7 @@
       </p:sp>
       <p:sp>
         <p:nvSpPr>
-          <p:cNvPr id="24" name="Text 22"/>
+          <p:cNvPr id="26" name="Text 24"/>
           <p:cNvSpPr/>
           <p:nvPr/>
         </p:nvSpPr>
@@ -7734,7 +8280,7 @@
       </p:sp>
       <p:sp>
         <p:nvSpPr>
-          <p:cNvPr id="25" name="Shape 23"/>
+          <p:cNvPr id="27" name="Shape 25"/>
           <p:cNvSpPr/>
           <p:nvPr/>
         </p:nvSpPr>
@@ -7761,7 +8307,7 @@
       </p:sp>
       <p:sp>
         <p:nvSpPr>
-          <p:cNvPr id="26" name="Shape 24"/>
+          <p:cNvPr id="28" name="Shape 26"/>
           <p:cNvSpPr/>
           <p:nvPr/>
         </p:nvSpPr>
@@ -7788,7 +8334,7 @@
       </p:sp>
       <p:sp>
         <p:nvSpPr>
-          <p:cNvPr id="27" name="Text 25"/>
+          <p:cNvPr id="29" name="Text 27"/>
           <p:cNvSpPr/>
           <p:nvPr/>
         </p:nvSpPr>
@@ -7827,7 +8373,7 @@
       </p:sp>
       <p:sp>
         <p:nvSpPr>
-          <p:cNvPr id="28" name="Text 26"/>
+          <p:cNvPr id="30" name="Text 28"/>
           <p:cNvSpPr/>
           <p:nvPr/>
         </p:nvSpPr>
@@ -7866,7 +8412,7 @@
       </p:sp>
       <p:sp>
         <p:nvSpPr>
-          <p:cNvPr id="29" name="Text 27"/>
+          <p:cNvPr id="31" name="Text 29"/>
           <p:cNvSpPr/>
           <p:nvPr/>
         </p:nvSpPr>
@@ -7905,7 +8451,7 @@
       </p:sp>
       <p:sp>
         <p:nvSpPr>
-          <p:cNvPr id="30" name="Text 28"/>
+          <p:cNvPr id="32" name="Text 30"/>
           <p:cNvSpPr/>
           <p:nvPr/>
         </p:nvSpPr>
